--- a/content/Lectures/Semester 1/Week 08 - Networks - Shortest Paths and MST/5 Source Files/Negative weight example (Dijkstra fails).pptx
+++ b/content/Lectures/Semester 1/Week 08 - Networks - Shortest Paths and MST/5 Source Files/Negative weight example (Dijkstra fails).pptx
@@ -7222,7 +7222,7 @@
           <a:p>
             <a:r>
               <a:rPr lang="en-GB" dirty="0"/>
-              <a:t>Question 2a</a:t>
+              <a:t>Dijkstra with a negative edge weight</a:t>
             </a:r>
           </a:p>
         </p:txBody>
